--- a/classes/parte-14-grc-riesgo-y-cumplimiento/285-auditoria-de-seguridad/clase-285-presentacion.pptx
+++ b/classes/parte-14-grc-riesgo-y-cumplimiento/285-auditoria-de-seguridad/clase-285-presentacion.pptx
@@ -17,6 +17,10 @@
     <p:sldId id="265" r:id="rId16"/>
     <p:sldId id="266" r:id="rId17"/>
     <p:sldId id="267" r:id="rId18"/>
+    <p:sldId id="268" r:id="rId19"/>
+    <p:sldId id="269" r:id="rId20"/>
+    <p:sldId id="270" r:id="rId21"/>
+    <p:sldId id="271" r:id="rId22"/>
   </p:sldIdLst>
   <p:sldSz cx="9144000" cy="6858000" type="screen4x3"/>
   <p:notesSz cx="6858000" cy="9144000"/>
@@ -3198,7 +3202,7 @@
                   <a:srgbClr val="0B3D2E"/>
                 </a:solidFill>
               </a:rPr>
-              <a:t>⚠️ Errores comunes</a:t>
+              <a:t>🧪 Laboratorio guiado (ejercicio aplicado)</a:t>
             </a:r>
           </a:p>
         </p:txBody>
@@ -3236,67 +3240,97 @@
                   <a:srgbClr val="22282E"/>
                 </a:solidFill>
               </a:rPr>
-              <a:t>•  Auditar sin criterio definido — Conclusiones subjetivas; fija el estándar antes de empezar</a:t>
-            </a:r>
-          </a:p>
-          <a:p>
-            <a:pPr>
-              <a:spcAft>
-                <a:spcPts val="600"/>
-              </a:spcAft>
-            </a:pPr>
-            <a:r>
-              <a:rPr sz="1500">
-                <a:solidFill>
-                  <a:srgbClr val="22282E"/>
-                </a:solidFill>
-              </a:rPr>
-              <a:t>•  Evidencia anecdótica ("me dijeron que...") — No es trazable; exige registros, configuraciones o logs</a:t>
-            </a:r>
-          </a:p>
-          <a:p>
-            <a:pPr>
-              <a:spcAft>
-                <a:spcPts val="600"/>
-              </a:spcAft>
-            </a:pPr>
-            <a:r>
-              <a:rPr sz="1500">
-                <a:solidFill>
-                  <a:srgbClr val="22282E"/>
-                </a:solidFill>
-              </a:rPr>
-              <a:t>•  Auditor sin independencia — Conflicto de interés; separa quien opera de quien audita</a:t>
-            </a:r>
-          </a:p>
-          <a:p>
-            <a:pPr>
-              <a:spcAft>
-                <a:spcPts val="600"/>
-              </a:spcAft>
-            </a:pPr>
-            <a:r>
-              <a:rPr sz="1500">
-                <a:solidFill>
-                  <a:srgbClr val="22282E"/>
-                </a:solidFill>
-              </a:rPr>
-              <a:t>•  Hallazgos sin causa raíz — Se repiten; en la CAPA analiza el porqué, no solo el qué</a:t>
-            </a:r>
-          </a:p>
-          <a:p>
-            <a:pPr>
-              <a:spcAft>
-                <a:spcPts val="600"/>
-              </a:spcAft>
-            </a:pPr>
-            <a:r>
-              <a:rPr sz="1500">
-                <a:solidFill>
-                  <a:srgbClr val="22282E"/>
-                </a:solidFill>
-              </a:rPr>
-              <a:t>•  Confundir SOC 2 Type I con Type II — Type I es diseño puntual; Type II prueba eficacia en el tiempo</a:t>
+              <a:t>•  Vas a preparar y "ejecutar" una auditoría interna de control de acceso en "Ferretería del Sur S.A.".</a:t>
+            </a:r>
+          </a:p>
+          <a:p>
+            <a:pPr>
+              <a:spcAft>
+                <a:spcPts val="600"/>
+              </a:spcAft>
+            </a:pPr>
+            <a:r>
+              <a:rPr sz="1500">
+                <a:solidFill>
+                  <a:srgbClr val="22282E"/>
+                </a:solidFill>
+              </a:rPr>
+              <a:t>•  Alcance y criterio: define el alcance ("gestión de accesos a la plataforma de e-commerce") y el criterio (la política de la clase 282 y el control ISO 27001 A.5.15/A.8.2).</a:t>
+            </a:r>
+          </a:p>
+          <a:p>
+            <a:pPr>
+              <a:spcAft>
+                <a:spcPts val="600"/>
+              </a:spcAft>
+            </a:pPr>
+            <a:r>
+              <a:rPr sz="1500">
+                <a:solidFill>
+                  <a:srgbClr val="22282E"/>
+                </a:solidFill>
+              </a:rPr>
+              <a:t>•  Plan de auditoría: redacta un plan con objetivos, criterio, áreas, entrevistados, fechas y método (revisión documental + muestreo técnico).</a:t>
+            </a:r>
+          </a:p>
+          <a:p>
+            <a:pPr>
+              <a:spcAft>
+                <a:spcPts val="600"/>
+              </a:spcAft>
+            </a:pPr>
+            <a:r>
+              <a:rPr sz="1500">
+                <a:solidFill>
+                  <a:srgbClr val="22282E"/>
+                </a:solidFill>
+              </a:rPr>
+              <a:t>•  Diseño de pruebas: para 4 controles (MFA obligatorio, revocación de accesos al cese, principio de mínimo privilegio, revisión trimestral de permisos), define qué evidencia solicitarías y cómo la…</a:t>
+            </a:r>
+          </a:p>
+          <a:p>
+            <a:pPr>
+              <a:spcAft>
+                <a:spcPts val="600"/>
+              </a:spcAft>
+            </a:pPr>
+            <a:r>
+              <a:rPr sz="1500">
+                <a:solidFill>
+                  <a:srgbClr val="22282E"/>
+                </a:solidFill>
+              </a:rPr>
+              <a:t>•  Muestreo: de una lista ficticia de 50 usuarios, define una muestra de 10 y comprueba (con datos de ejemplo) si tienen MFA y si los ex-empleados están deshabilitados.</a:t>
+            </a:r>
+          </a:p>
+          <a:p>
+            <a:pPr>
+              <a:spcAft>
+                <a:spcPts val="600"/>
+              </a:spcAft>
+            </a:pPr>
+            <a:r>
+              <a:rPr sz="1500">
+                <a:solidFill>
+                  <a:srgbClr val="22282E"/>
+                </a:solidFill>
+              </a:rPr>
+              <a:t>•  Registro de hallazgos: documenta al menos 2 hallazgos (p. ej. "3 de 10 cuentas sin MFA"; "1 ex-empleado con acceso activo"), clasifícalos en mayor/menor y anota la evidencia.</a:t>
+            </a:r>
+          </a:p>
+          <a:p>
+            <a:pPr>
+              <a:spcAft>
+                <a:spcPts val="600"/>
+              </a:spcAft>
+            </a:pPr>
+            <a:r>
+              <a:rPr sz="1500">
+                <a:solidFill>
+                  <a:srgbClr val="22282E"/>
+                </a:solidFill>
+              </a:rPr>
+              <a:t>•  CAPA: para cada hallazgo redacta la acción correctiva, la causa raíz y la fecha de cierre.</a:t>
             </a:r>
           </a:p>
         </p:txBody>
@@ -3347,7 +3381,7 @@
                   <a:srgbClr val="0B3D2E"/>
                 </a:solidFill>
               </a:rPr>
-              <a:t>❓ Preguntas frecuentes</a:t>
+              <a:t>✍️ Ejercicios</a:t>
             </a:r>
           </a:p>
         </p:txBody>
@@ -3385,97 +3419,82 @@
                   <a:srgbClr val="22282E"/>
                 </a:solidFill>
               </a:rPr>
-              <a:t>•  ❓ ¿La auditoría es lo mismo que un pentest?</a:t>
-            </a:r>
-          </a:p>
-          <a:p>
-            <a:pPr>
-              <a:spcAft>
-                <a:spcPts val="600"/>
-              </a:spcAft>
-            </a:pPr>
-            <a:r>
-              <a:rPr sz="1500">
-                <a:solidFill>
-                  <a:srgbClr val="22282E"/>
-                </a:solidFill>
-              </a:rPr>
-              <a:t>•  No. El pentest prueba explotabilidad técnica; la auditoría evalúa si los controles existen, están diseñados y operan según un criterio. Se complementan.</a:t>
-            </a:r>
-          </a:p>
-          <a:p>
-            <a:pPr>
-              <a:spcAft>
-                <a:spcPts val="600"/>
-              </a:spcAft>
-            </a:pPr>
-            <a:r>
-              <a:rPr sz="1500">
-                <a:solidFill>
-                  <a:srgbClr val="22282E"/>
-                </a:solidFill>
-              </a:rPr>
-              <a:t>•  ❓ ¿SOC 2 lo emite cualquiera?</a:t>
-            </a:r>
-          </a:p>
-          <a:p>
-            <a:pPr>
-              <a:spcAft>
-                <a:spcPts val="600"/>
-              </a:spcAft>
-            </a:pPr>
-            <a:r>
-              <a:rPr sz="1500">
-                <a:solidFill>
-                  <a:srgbClr val="22282E"/>
-                </a:solidFill>
-              </a:rPr>
-              <a:t>•  No; lo emite un auditor CPA independiente conforme a los estándares de la AICPA. Por eso da aseguramiento a los clientes del proveedor.</a:t>
-            </a:r>
-          </a:p>
-          <a:p>
-            <a:pPr>
-              <a:spcAft>
-                <a:spcPts val="600"/>
-              </a:spcAft>
-            </a:pPr>
-            <a:r>
-              <a:rPr sz="1500">
-                <a:solidFill>
-                  <a:srgbClr val="22282E"/>
-                </a:solidFill>
-              </a:rPr>
-              <a:t>•  ❓ ¿Una no conformidad menor bloquea la certificación?</a:t>
-            </a:r>
-          </a:p>
-          <a:p>
-            <a:pPr>
-              <a:spcAft>
-                <a:spcPts val="600"/>
-              </a:spcAft>
-            </a:pPr>
-            <a:r>
-              <a:rPr sz="1500">
-                <a:solidFill>
-                  <a:srgbClr val="22282E"/>
-                </a:solidFill>
-              </a:rPr>
-              <a:t>•  Normalmente no si se aborda con una CAPA; una mayor sí suele bloquearla hasta corregirse. Depende del esquema.</a:t>
-            </a:r>
-          </a:p>
-          <a:p>
-            <a:pPr>
-              <a:spcAft>
-                <a:spcPts val="600"/>
-              </a:spcAft>
-            </a:pPr>
-            <a:r>
-              <a:rPr sz="1500">
-                <a:solidFill>
-                  <a:srgbClr val="22282E"/>
-                </a:solidFill>
-              </a:rPr>
-              <a:t>•  ❓ ¿Qué es la auditoría continua?</a:t>
+              <a:t>•  Diferencia auditoría de primera, segunda y tercera parte con un ejemplo.</a:t>
+            </a:r>
+          </a:p>
+          <a:p>
+            <a:pPr>
+              <a:spcAft>
+                <a:spcPts val="600"/>
+              </a:spcAft>
+            </a:pPr>
+            <a:r>
+              <a:rPr sz="1500">
+                <a:solidFill>
+                  <a:srgbClr val="22282E"/>
+                </a:solidFill>
+              </a:rPr>
+              <a:t>•  ¿Por qué el auditor no puede auditar su propio trabajo? Explica el principio de independencia.</a:t>
+            </a:r>
+          </a:p>
+          <a:p>
+            <a:pPr>
+              <a:spcAft>
+                <a:spcPts val="600"/>
+              </a:spcAft>
+            </a:pPr>
+            <a:r>
+              <a:rPr sz="1500">
+                <a:solidFill>
+                  <a:srgbClr val="22282E"/>
+                </a:solidFill>
+              </a:rPr>
+              <a:t>•  Convierte un control ("los accesos se revisan trimestralmente") en una prueba de auditoría con evidencia concreta.</a:t>
+            </a:r>
+          </a:p>
+          <a:p>
+            <a:pPr>
+              <a:spcAft>
+                <a:spcPts val="600"/>
+              </a:spcAft>
+            </a:pPr>
+            <a:r>
+              <a:rPr sz="1500">
+                <a:solidFill>
+                  <a:srgbClr val="22282E"/>
+                </a:solidFill>
+              </a:rPr>
+              <a:t>•  Explica la diferencia entre SOC 2 Type I y Type II.</a:t>
+            </a:r>
+          </a:p>
+          <a:p>
+            <a:pPr>
+              <a:spcAft>
+                <a:spcPts val="600"/>
+              </a:spcAft>
+            </a:pPr>
+            <a:r>
+              <a:rPr sz="1500">
+                <a:solidFill>
+                  <a:srgbClr val="22282E"/>
+                </a:solidFill>
+              </a:rPr>
+              <a:t>•  Clasifica en mayor/menor: falta total de MFA en administradores; una excepción documentada y aprobada.</a:t>
+            </a:r>
+          </a:p>
+          <a:p>
+            <a:pPr>
+              <a:spcAft>
+                <a:spcPts val="600"/>
+              </a:spcAft>
+            </a:pPr>
+            <a:r>
+              <a:rPr sz="1500">
+                <a:solidFill>
+                  <a:srgbClr val="22282E"/>
+                </a:solidFill>
+              </a:rPr>
+              <a:t>•  Redacta una CAPA para el hallazgo "logs del SIEM se retienen 7 días en lugar de 90".</a:t>
             </a:r>
           </a:p>
         </p:txBody>
@@ -3526,7 +3545,7 @@
                   <a:srgbClr val="0B3D2E"/>
                 </a:solidFill>
               </a:rPr>
-              <a:t>🔗 Referencias</a:t>
+              <a:t>📝 Reto verificable</a:t>
             </a:r>
           </a:p>
         </p:txBody>
@@ -3564,6 +3583,438 @@
                   <a:srgbClr val="22282E"/>
                 </a:solidFill>
               </a:rPr>
+              <a:t>•  Entrega un paquete de auditoría interna con: plan de auditoría, diseño de pruebas para 4 controles, muestreo ejecutado con hallazgos clasificados, CAPA por hallazgo y un informe ejecutivo con…</a:t>
+            </a:r>
+          </a:p>
+          <a:p>
+            <a:pPr>
+              <a:spcAft>
+                <a:spcPts val="600"/>
+              </a:spcAft>
+            </a:pPr>
+            <a:r>
+              <a:rPr sz="1500">
+                <a:solidFill>
+                  <a:srgbClr val="22282E"/>
+                </a:solidFill>
+              </a:rPr>
+              <a:t>•  Criterio de aceptación: cada hallazgo cita evidencia y criterio incumplido, cada CAPA identifica causa raíz y fecha de cierre, y el informe distingue hallazgos mayores de menores con recomendaciones…</a:t>
+            </a:r>
+          </a:p>
+        </p:txBody>
+      </p:sp>
+    </p:spTree>
+  </p:cSld>
+  <p:clrMapOvr>
+    <a:masterClrMapping/>
+  </p:clrMapOvr>
+</p:sld>
+</file>
+
+<file path=ppt/slides/slide13.xml><?xml version="1.0" encoding="utf-8"?>
+<p:sld xmlns:a="http://schemas.openxmlformats.org/drawingml/2006/main" xmlns:p="http://schemas.openxmlformats.org/presentationml/2006/main" xmlns:r="http://schemas.openxmlformats.org/officeDocument/2006/relationships">
+  <p:cSld>
+    <p:spTree>
+      <p:nvGrpSpPr>
+        <p:cNvPr id="1" name=""/>
+        <p:cNvGrpSpPr/>
+        <p:nvPr/>
+      </p:nvGrpSpPr>
+      <p:grpSpPr/>
+      <p:sp>
+        <p:nvSpPr>
+          <p:cNvPr id="2" name="TextBox 1"/>
+          <p:cNvSpPr txBox="1"/>
+          <p:nvPr/>
+        </p:nvSpPr>
+        <p:spPr>
+          <a:xfrm>
+            <a:off x="457200" y="320040"/>
+            <a:ext cx="8229600" cy="822960"/>
+          </a:xfrm>
+          <a:prstGeom prst="rect">
+            <a:avLst/>
+          </a:prstGeom>
+          <a:noFill/>
+        </p:spPr>
+        <p:txBody>
+          <a:bodyPr wrap="square">
+            <a:spAutoFit/>
+          </a:bodyPr>
+          <a:lstStyle/>
+          <a:p>
+            <a:r>
+              <a:rPr sz="2600" b="1">
+                <a:solidFill>
+                  <a:srgbClr val="0B3D2E"/>
+                </a:solidFill>
+              </a:rPr>
+              <a:t>⚠️ Errores comunes</a:t>
+            </a:r>
+          </a:p>
+        </p:txBody>
+      </p:sp>
+      <p:sp>
+        <p:nvSpPr>
+          <p:cNvPr id="3" name="TextBox 2"/>
+          <p:cNvSpPr txBox="1"/>
+          <p:nvPr/>
+        </p:nvSpPr>
+        <p:spPr>
+          <a:xfrm>
+            <a:off x="457200" y="1280160"/>
+            <a:ext cx="8229600" cy="4937760"/>
+          </a:xfrm>
+          <a:prstGeom prst="rect">
+            <a:avLst/>
+          </a:prstGeom>
+          <a:noFill/>
+        </p:spPr>
+        <p:txBody>
+          <a:bodyPr wrap="square">
+            <a:spAutoFit/>
+          </a:bodyPr>
+          <a:lstStyle/>
+          <a:p>
+            <a:pPr>
+              <a:spcAft>
+                <a:spcPts val="600"/>
+              </a:spcAft>
+            </a:pPr>
+            <a:r>
+              <a:rPr sz="1500">
+                <a:solidFill>
+                  <a:srgbClr val="22282E"/>
+                </a:solidFill>
+              </a:rPr>
+              <a:t>•  Auditar sin criterio definido — Conclusiones subjetivas; fija el estándar antes de empezar</a:t>
+            </a:r>
+          </a:p>
+          <a:p>
+            <a:pPr>
+              <a:spcAft>
+                <a:spcPts val="600"/>
+              </a:spcAft>
+            </a:pPr>
+            <a:r>
+              <a:rPr sz="1500">
+                <a:solidFill>
+                  <a:srgbClr val="22282E"/>
+                </a:solidFill>
+              </a:rPr>
+              <a:t>•  Evidencia anecdótica ("me dijeron que...") — No es trazable; exige registros, configuraciones o logs</a:t>
+            </a:r>
+          </a:p>
+          <a:p>
+            <a:pPr>
+              <a:spcAft>
+                <a:spcPts val="600"/>
+              </a:spcAft>
+            </a:pPr>
+            <a:r>
+              <a:rPr sz="1500">
+                <a:solidFill>
+                  <a:srgbClr val="22282E"/>
+                </a:solidFill>
+              </a:rPr>
+              <a:t>•  Auditor sin independencia — Conflicto de interés; separa quien opera de quien audita</a:t>
+            </a:r>
+          </a:p>
+          <a:p>
+            <a:pPr>
+              <a:spcAft>
+                <a:spcPts val="600"/>
+              </a:spcAft>
+            </a:pPr>
+            <a:r>
+              <a:rPr sz="1500">
+                <a:solidFill>
+                  <a:srgbClr val="22282E"/>
+                </a:solidFill>
+              </a:rPr>
+              <a:t>•  Hallazgos sin causa raíz — Se repiten; en la CAPA analiza el porqué, no solo el qué</a:t>
+            </a:r>
+          </a:p>
+          <a:p>
+            <a:pPr>
+              <a:spcAft>
+                <a:spcPts val="600"/>
+              </a:spcAft>
+            </a:pPr>
+            <a:r>
+              <a:rPr sz="1500">
+                <a:solidFill>
+                  <a:srgbClr val="22282E"/>
+                </a:solidFill>
+              </a:rPr>
+              <a:t>•  Confundir SOC 2 Type I con Type II — Type I es diseño puntual; Type II prueba eficacia en el tiempo</a:t>
+            </a:r>
+          </a:p>
+        </p:txBody>
+      </p:sp>
+    </p:spTree>
+  </p:cSld>
+  <p:clrMapOvr>
+    <a:masterClrMapping/>
+  </p:clrMapOvr>
+</p:sld>
+</file>
+
+<file path=ppt/slides/slide14.xml><?xml version="1.0" encoding="utf-8"?>
+<p:sld xmlns:a="http://schemas.openxmlformats.org/drawingml/2006/main" xmlns:p="http://schemas.openxmlformats.org/presentationml/2006/main" xmlns:r="http://schemas.openxmlformats.org/officeDocument/2006/relationships">
+  <p:cSld>
+    <p:spTree>
+      <p:nvGrpSpPr>
+        <p:cNvPr id="1" name=""/>
+        <p:cNvGrpSpPr/>
+        <p:nvPr/>
+      </p:nvGrpSpPr>
+      <p:grpSpPr/>
+      <p:sp>
+        <p:nvSpPr>
+          <p:cNvPr id="2" name="TextBox 1"/>
+          <p:cNvSpPr txBox="1"/>
+          <p:nvPr/>
+        </p:nvSpPr>
+        <p:spPr>
+          <a:xfrm>
+            <a:off x="457200" y="320040"/>
+            <a:ext cx="8229600" cy="822960"/>
+          </a:xfrm>
+          <a:prstGeom prst="rect">
+            <a:avLst/>
+          </a:prstGeom>
+          <a:noFill/>
+        </p:spPr>
+        <p:txBody>
+          <a:bodyPr wrap="square">
+            <a:spAutoFit/>
+          </a:bodyPr>
+          <a:lstStyle/>
+          <a:p>
+            <a:r>
+              <a:rPr sz="2600" b="1">
+                <a:solidFill>
+                  <a:srgbClr val="0B3D2E"/>
+                </a:solidFill>
+              </a:rPr>
+              <a:t>❓ Preguntas frecuentes</a:t>
+            </a:r>
+          </a:p>
+        </p:txBody>
+      </p:sp>
+      <p:sp>
+        <p:nvSpPr>
+          <p:cNvPr id="3" name="TextBox 2"/>
+          <p:cNvSpPr txBox="1"/>
+          <p:nvPr/>
+        </p:nvSpPr>
+        <p:spPr>
+          <a:xfrm>
+            <a:off x="457200" y="1280160"/>
+            <a:ext cx="8229600" cy="4937760"/>
+          </a:xfrm>
+          <a:prstGeom prst="rect">
+            <a:avLst/>
+          </a:prstGeom>
+          <a:noFill/>
+        </p:spPr>
+        <p:txBody>
+          <a:bodyPr wrap="square">
+            <a:spAutoFit/>
+          </a:bodyPr>
+          <a:lstStyle/>
+          <a:p>
+            <a:pPr>
+              <a:spcAft>
+                <a:spcPts val="600"/>
+              </a:spcAft>
+            </a:pPr>
+            <a:r>
+              <a:rPr sz="1500">
+                <a:solidFill>
+                  <a:srgbClr val="22282E"/>
+                </a:solidFill>
+              </a:rPr>
+              <a:t>•  ❓ ¿La auditoría es lo mismo que un pentest?</a:t>
+            </a:r>
+          </a:p>
+          <a:p>
+            <a:pPr>
+              <a:spcAft>
+                <a:spcPts val="600"/>
+              </a:spcAft>
+            </a:pPr>
+            <a:r>
+              <a:rPr sz="1500">
+                <a:solidFill>
+                  <a:srgbClr val="22282E"/>
+                </a:solidFill>
+              </a:rPr>
+              <a:t>•  No. El pentest prueba explotabilidad técnica; la auditoría evalúa si los controles existen, están diseñados y operan según un criterio. Se complementan.</a:t>
+            </a:r>
+          </a:p>
+          <a:p>
+            <a:pPr>
+              <a:spcAft>
+                <a:spcPts val="600"/>
+              </a:spcAft>
+            </a:pPr>
+            <a:r>
+              <a:rPr sz="1500">
+                <a:solidFill>
+                  <a:srgbClr val="22282E"/>
+                </a:solidFill>
+              </a:rPr>
+              <a:t>•  ❓ ¿SOC 2 lo emite cualquiera?</a:t>
+            </a:r>
+          </a:p>
+          <a:p>
+            <a:pPr>
+              <a:spcAft>
+                <a:spcPts val="600"/>
+              </a:spcAft>
+            </a:pPr>
+            <a:r>
+              <a:rPr sz="1500">
+                <a:solidFill>
+                  <a:srgbClr val="22282E"/>
+                </a:solidFill>
+              </a:rPr>
+              <a:t>•  No; lo emite un auditor CPA independiente conforme a los estándares de la AICPA. Por eso da aseguramiento a los clientes del proveedor.</a:t>
+            </a:r>
+          </a:p>
+          <a:p>
+            <a:pPr>
+              <a:spcAft>
+                <a:spcPts val="600"/>
+              </a:spcAft>
+            </a:pPr>
+            <a:r>
+              <a:rPr sz="1500">
+                <a:solidFill>
+                  <a:srgbClr val="22282E"/>
+                </a:solidFill>
+              </a:rPr>
+              <a:t>•  ❓ ¿Una no conformidad menor bloquea la certificación?</a:t>
+            </a:r>
+          </a:p>
+          <a:p>
+            <a:pPr>
+              <a:spcAft>
+                <a:spcPts val="600"/>
+              </a:spcAft>
+            </a:pPr>
+            <a:r>
+              <a:rPr sz="1500">
+                <a:solidFill>
+                  <a:srgbClr val="22282E"/>
+                </a:solidFill>
+              </a:rPr>
+              <a:t>•  Normalmente no si se aborda con una CAPA; una mayor sí suele bloquearla hasta corregirse. Depende del esquema.</a:t>
+            </a:r>
+          </a:p>
+          <a:p>
+            <a:pPr>
+              <a:spcAft>
+                <a:spcPts val="600"/>
+              </a:spcAft>
+            </a:pPr>
+            <a:r>
+              <a:rPr sz="1500">
+                <a:solidFill>
+                  <a:srgbClr val="22282E"/>
+                </a:solidFill>
+              </a:rPr>
+              <a:t>•  ❓ ¿Qué es la auditoría continua?</a:t>
+            </a:r>
+          </a:p>
+        </p:txBody>
+      </p:sp>
+    </p:spTree>
+  </p:cSld>
+  <p:clrMapOvr>
+    <a:masterClrMapping/>
+  </p:clrMapOvr>
+</p:sld>
+</file>
+
+<file path=ppt/slides/slide15.xml><?xml version="1.0" encoding="utf-8"?>
+<p:sld xmlns:a="http://schemas.openxmlformats.org/drawingml/2006/main" xmlns:p="http://schemas.openxmlformats.org/presentationml/2006/main" xmlns:r="http://schemas.openxmlformats.org/officeDocument/2006/relationships">
+  <p:cSld>
+    <p:spTree>
+      <p:nvGrpSpPr>
+        <p:cNvPr id="1" name=""/>
+        <p:cNvGrpSpPr/>
+        <p:nvPr/>
+      </p:nvGrpSpPr>
+      <p:grpSpPr/>
+      <p:sp>
+        <p:nvSpPr>
+          <p:cNvPr id="2" name="TextBox 1"/>
+          <p:cNvSpPr txBox="1"/>
+          <p:nvPr/>
+        </p:nvSpPr>
+        <p:spPr>
+          <a:xfrm>
+            <a:off x="457200" y="320040"/>
+            <a:ext cx="8229600" cy="822960"/>
+          </a:xfrm>
+          <a:prstGeom prst="rect">
+            <a:avLst/>
+          </a:prstGeom>
+          <a:noFill/>
+        </p:spPr>
+        <p:txBody>
+          <a:bodyPr wrap="square">
+            <a:spAutoFit/>
+          </a:bodyPr>
+          <a:lstStyle/>
+          <a:p>
+            <a:r>
+              <a:rPr sz="2600" b="1">
+                <a:solidFill>
+                  <a:srgbClr val="0B3D2E"/>
+                </a:solidFill>
+              </a:rPr>
+              <a:t>🔗 Referencias</a:t>
+            </a:r>
+          </a:p>
+        </p:txBody>
+      </p:sp>
+      <p:sp>
+        <p:nvSpPr>
+          <p:cNvPr id="3" name="TextBox 2"/>
+          <p:cNvSpPr txBox="1"/>
+          <p:nvPr/>
+        </p:nvSpPr>
+        <p:spPr>
+          <a:xfrm>
+            <a:off x="457200" y="1280160"/>
+            <a:ext cx="8229600" cy="4937760"/>
+          </a:xfrm>
+          <a:prstGeom prst="rect">
+            <a:avLst/>
+          </a:prstGeom>
+          <a:noFill/>
+        </p:spPr>
+        <p:txBody>
+          <a:bodyPr wrap="square">
+            <a:spAutoFit/>
+          </a:bodyPr>
+          <a:lstStyle/>
+          <a:p>
+            <a:pPr>
+              <a:spcAft>
+                <a:spcPts val="600"/>
+              </a:spcAft>
+            </a:pPr>
+            <a:r>
+              <a:rPr sz="1500">
+                <a:solidFill>
+                  <a:srgbClr val="22282E"/>
+                </a:solidFill>
+              </a:rPr>
               <a:t>•  ISO 19011:2018 — Directrices para la auditoría de sistemas de gestión. &lt;https://www.iso.org/standard/70017.html&gt;</a:t>
             </a:r>
           </a:p>
@@ -3629,6 +4080,81 @@
           </a:p>
         </p:txBody>
       </p:sp>
+    </p:spTree>
+  </p:cSld>
+  <p:clrMapOvr>
+    <a:masterClrMapping/>
+  </p:clrMapOvr>
+</p:sld>
+</file>
+
+<file path=ppt/slides/slide16.xml><?xml version="1.0" encoding="utf-8"?>
+<p:sld xmlns:a="http://schemas.openxmlformats.org/drawingml/2006/main" xmlns:p="http://schemas.openxmlformats.org/presentationml/2006/main" xmlns:r="http://schemas.openxmlformats.org/officeDocument/2006/relationships">
+  <p:cSld>
+    <p:spTree>
+      <p:nvGrpSpPr>
+        <p:cNvPr id="1" name=""/>
+        <p:cNvGrpSpPr/>
+        <p:nvPr/>
+      </p:nvGrpSpPr>
+      <p:grpSpPr/>
+      <p:sp>
+        <p:nvSpPr>
+          <p:cNvPr id="2" name="TextBox 1"/>
+          <p:cNvSpPr txBox="1"/>
+          <p:nvPr/>
+        </p:nvSpPr>
+        <p:spPr>
+          <a:xfrm>
+            <a:off x="457200" y="274320"/>
+            <a:ext cx="8229600" cy="640080"/>
+          </a:xfrm>
+          <a:prstGeom prst="rect">
+            <a:avLst/>
+          </a:prstGeom>
+          <a:noFill/>
+        </p:spPr>
+        <p:txBody>
+          <a:bodyPr wrap="square">
+            <a:spAutoFit/>
+          </a:bodyPr>
+          <a:lstStyle/>
+          <a:p>
+            <a:r>
+              <a:rPr sz="2200" b="1">
+                <a:solidFill>
+                  <a:srgbClr val="0B3D2E"/>
+                </a:solidFill>
+              </a:rPr>
+              <a:t>Diagrama de la clase</a:t>
+            </a:r>
+          </a:p>
+        </p:txBody>
+      </p:sp>
+      <p:pic>
+        <p:nvPicPr>
+          <p:cNvPr id="3" name="Picture 2" descr="e7b98afb9b43c33c.png"/>
+          <p:cNvPicPr>
+            <a:picLocks noChangeAspect="1"/>
+          </p:cNvPicPr>
+          <p:nvPr/>
+        </p:nvPicPr>
+        <p:blipFill>
+          <a:blip r:embed="rId2"/>
+          <a:stretch>
+            <a:fillRect/>
+          </a:stretch>
+        </p:blipFill>
+        <p:spPr>
+          <a:xfrm>
+            <a:off x="457200" y="3506724"/>
+            <a:ext cx="8229600" cy="484632"/>
+          </a:xfrm>
+          <a:prstGeom prst="rect">
+            <a:avLst/>
+          </a:prstGeom>
+        </p:spPr>
+      </p:pic>
     </p:spTree>
   </p:cSld>
   <p:clrMapOvr>
@@ -3713,7 +4239,7 @@
                   <a:srgbClr val="22282E"/>
                 </a:solidFill>
               </a:rPr>
-              <a:t>•  Aprender qué es una auditoría de seguridad, cómo se planifica y ejecuta, y cómo se sobrevive a ella desde el lado auditado. Al terminar sabrás distinguir auditoría interna de externa, recopilar y presentar evidencia, entender los informes SOC 1/SOC 2/SOC 3, gestionar hallazgos y no conformidades, y usar la auditoría como herramienta de mejora, no como examen temido.</a:t>
+              <a:t>•  Aprender qué es una auditoría de seguridad, cómo se planifica y ejecuta, y cómo se sobrevive a ella desde el lado auditado. Al terminar sabrás distinguir auditoría interna de externa, recopilar y…</a:t>
             </a:r>
           </a:p>
         </p:txBody>
@@ -4107,7 +4633,7 @@
                   <a:srgbClr val="0B3D2E"/>
                 </a:solidFill>
               </a:rPr>
-              <a:t>📖 Definiciones y características</a:t>
+              <a:t>🧠 Explicación en profundidad</a:t>
             </a:r>
           </a:p>
         </p:txBody>
@@ -4145,97 +4671,22 @@
                   <a:srgbClr val="22282E"/>
                 </a:solidFill>
               </a:rPr>
-              <a:t>•  Auditoría de seguridad: evaluación sistemática e independiente de controles frente a un criterio. Clave: independencia y objetividad.</a:t>
-            </a:r>
-          </a:p>
-          <a:p>
-            <a:pPr>
-              <a:spcAft>
-                <a:spcPts val="600"/>
-              </a:spcAft>
-            </a:pPr>
-            <a:r>
-              <a:rPr sz="1500">
-                <a:solidFill>
-                  <a:srgbClr val="22282E"/>
-                </a:solidFill>
-              </a:rPr>
-              <a:t>•  Auditor de primera/segunda/tercera parte: interno, del cliente, o externo independiente. Clave: la certificación exige tercera parte.</a:t>
-            </a:r>
-          </a:p>
-          <a:p>
-            <a:pPr>
-              <a:spcAft>
-                <a:spcPts val="600"/>
-              </a:spcAft>
-            </a:pPr>
-            <a:r>
-              <a:rPr sz="1500">
-                <a:solidFill>
-                  <a:srgbClr val="22282E"/>
-                </a:solidFill>
-              </a:rPr>
-              <a:t>•  Criterio de auditoría: el estándar contra el que se compara (ISO 27001, PCI-DSS, política interna). Clave: sin criterio no hay auditoría.</a:t>
-            </a:r>
-          </a:p>
-          <a:p>
-            <a:pPr>
-              <a:spcAft>
-                <a:spcPts val="600"/>
-              </a:spcAft>
-            </a:pPr>
-            <a:r>
-              <a:rPr sz="1500">
-                <a:solidFill>
-                  <a:srgbClr val="22282E"/>
-                </a:solidFill>
-              </a:rPr>
-              <a:t>•  Evidencia: registros, entrevistas, observaciones y reejecuciones que sustentan una conclusión. Clave: debe ser trazable y suficiente.</a:t>
-            </a:r>
-          </a:p>
-          <a:p>
-            <a:pPr>
-              <a:spcAft>
-                <a:spcPts val="600"/>
-              </a:spcAft>
-            </a:pPr>
-            <a:r>
-              <a:rPr sz="1500">
-                <a:solidFill>
-                  <a:srgbClr val="22282E"/>
-                </a:solidFill>
-              </a:rPr>
-              <a:t>•  SOC 2: informe de aseguramiento sobre los Trust Services Criteria (seguridad, disponibilidad, confidencialidad, etc.). Clave: Type I evalúa el diseño; Type II, la eficacia operativa en un periodo.</a:t>
-            </a:r>
-          </a:p>
-          <a:p>
-            <a:pPr>
-              <a:spcAft>
-                <a:spcPts val="600"/>
-              </a:spcAft>
-            </a:pPr>
-            <a:r>
-              <a:rPr sz="1500">
-                <a:solidFill>
-                  <a:srgbClr val="22282E"/>
-                </a:solidFill>
-              </a:rPr>
-              <a:t>•  Hallazgo / no conformidad: incumplimiento detectado; mayor o menor. Clave: genera acción correctiva.</a:t>
-            </a:r>
-          </a:p>
-          <a:p>
-            <a:pPr>
-              <a:spcAft>
-                <a:spcPts val="600"/>
-              </a:spcAft>
-            </a:pPr>
-            <a:r>
-              <a:rPr sz="1500">
-                <a:solidFill>
-                  <a:srgbClr val="22282E"/>
-                </a:solidFill>
-              </a:rPr>
-              <a:t>•  CAPA: acción correctiva y preventiva. Clave: corrige la causa raíz, no solo el síntoma.</a:t>
+              <a:t>•  Auditar es obtener evidencia suficiente y apropiada contra criterios acordados. Independencia, muestreo y trazabilidad condicionan la conclusión. Una entrevista describe diseño; una configuración o…</a:t>
+            </a:r>
+          </a:p>
+          <a:p>
+            <a:pPr>
+              <a:spcAft>
+                <a:spcPts val="600"/>
+              </a:spcAft>
+            </a:pPr>
+            <a:r>
+              <a:rPr sz="1500">
+                <a:solidFill>
+                  <a:srgbClr val="22282E"/>
+                </a:solidFill>
+              </a:rPr>
+              <a:t>•  Cinco tickets cerrados no demuestran el año completo. El auditor justifica población, selección y limitación antes de concluir.</a:t>
             </a:r>
           </a:p>
         </p:txBody>
@@ -4286,7 +4737,7 @@
                   <a:srgbClr val="0B3D2E"/>
                 </a:solidFill>
               </a:rPr>
-              <a:t>🧰 Herramientas y preparación</a:t>
+              <a:t>📔 Glosario operativo</a:t>
             </a:r>
           </a:p>
         </p:txBody>
@@ -4324,52 +4775,52 @@
                   <a:srgbClr val="22282E"/>
                 </a:solidFill>
               </a:rPr>
-              <a:t>•  Hoja de cálculo para el plan de auditoría, la matriz de evidencia y el registro de hallazgos.</a:t>
-            </a:r>
-          </a:p>
-          <a:p>
-            <a:pPr>
-              <a:spcAft>
-                <a:spcPts val="600"/>
-              </a:spcAft>
-            </a:pPr>
-            <a:r>
-              <a:rPr sz="1500">
-                <a:solidFill>
-                  <a:srgbClr val="22282E"/>
-                </a:solidFill>
-              </a:rPr>
-              <a:t>•  Referencia: ISO 19011 (directrices para auditar sistemas de gestión) y los Trust Services Criteria de AICPA (SOC 2).</a:t>
-            </a:r>
-          </a:p>
-          <a:p>
-            <a:pPr>
-              <a:spcAft>
-                <a:spcPts val="600"/>
-              </a:spcAft>
-            </a:pPr>
-            <a:r>
-              <a:rPr sz="1500">
-                <a:solidFill>
-                  <a:srgbClr val="22282E"/>
-                </a:solidFill>
-              </a:rPr>
-              <a:t>•  Para evidencia técnica: capturas de configuración, logs, exportaciones de un IAM/SIEM (reutiliza lo aprendido en partes previas).</a:t>
-            </a:r>
-          </a:p>
-          <a:p>
-            <a:pPr>
-              <a:spcAft>
-                <a:spcPts val="600"/>
-              </a:spcAft>
-            </a:pPr>
-            <a:r>
-              <a:rPr sz="1500">
-                <a:solidFill>
-                  <a:srgbClr val="22282E"/>
-                </a:solidFill>
-              </a:rPr>
-              <a:t>•  Opcional: herramientas GRC de recolección continua de evidencia (Vanta, Drata) a nivel conceptual.</a:t>
+              <a:t>•  Término — Definición</a:t>
+            </a:r>
+          </a:p>
+          <a:p>
+            <a:pPr>
+              <a:spcAft>
+                <a:spcPts val="600"/>
+              </a:spcAft>
+            </a:pPr>
+            <a:r>
+              <a:rPr sz="1500">
+                <a:solidFill>
+                  <a:srgbClr val="22282E"/>
+                </a:solidFill>
+              </a:rPr>
+              <a:t>•  Criterio — Requisito contra el que se compara evidencia.</a:t>
+            </a:r>
+          </a:p>
+          <a:p>
+            <a:pPr>
+              <a:spcAft>
+                <a:spcPts val="600"/>
+              </a:spcAft>
+            </a:pPr>
+            <a:r>
+              <a:rPr sz="1500">
+                <a:solidFill>
+                  <a:srgbClr val="22282E"/>
+                </a:solidFill>
+              </a:rPr>
+              <a:t>•  Muestra — Subconjunto seleccionado mediante método documentado.</a:t>
+            </a:r>
+          </a:p>
+          <a:p>
+            <a:pPr>
+              <a:spcAft>
+                <a:spcPts val="600"/>
+              </a:spcAft>
+            </a:pPr>
+            <a:r>
+              <a:rPr sz="1500">
+                <a:solidFill>
+                  <a:srgbClr val="22282E"/>
+                </a:solidFill>
+              </a:rPr>
+              <a:t>•  Hallazgo — Diferencia sustentada entre criterio y condición.</a:t>
             </a:r>
           </a:p>
         </p:txBody>
@@ -4420,7 +4871,7 @@
                   <a:srgbClr val="0B3D2E"/>
                 </a:solidFill>
               </a:rPr>
-              <a:t>🧪 Laboratorio guiado (ejercicio aplicado)</a:t>
+              <a:t>✅ Criterio de dominio</a:t>
             </a:r>
           </a:p>
         </p:txBody>
@@ -4458,97 +4909,7 @@
                   <a:srgbClr val="22282E"/>
                 </a:solidFill>
               </a:rPr>
-              <a:t>•  Vas a preparar y "ejecutar" una auditoría interna de control de acceso en "Ferretería del Sur S.A.".</a:t>
-            </a:r>
-          </a:p>
-          <a:p>
-            <a:pPr>
-              <a:spcAft>
-                <a:spcPts val="600"/>
-              </a:spcAft>
-            </a:pPr>
-            <a:r>
-              <a:rPr sz="1500">
-                <a:solidFill>
-                  <a:srgbClr val="22282E"/>
-                </a:solidFill>
-              </a:rPr>
-              <a:t>•  Alcance y criterio: define el alcance ("gestión de accesos a la plataforma de e-commerce") y el criterio (la política de la clase 282 y el control ISO 27001 A.5.15/A.8.2).</a:t>
-            </a:r>
-          </a:p>
-          <a:p>
-            <a:pPr>
-              <a:spcAft>
-                <a:spcPts val="600"/>
-              </a:spcAft>
-            </a:pPr>
-            <a:r>
-              <a:rPr sz="1500">
-                <a:solidFill>
-                  <a:srgbClr val="22282E"/>
-                </a:solidFill>
-              </a:rPr>
-              <a:t>•  Plan de auditoría: redacta un plan con objetivos, criterio, áreas, entrevistados, fechas y método (revisión documental + muestreo técnico).</a:t>
-            </a:r>
-          </a:p>
-          <a:p>
-            <a:pPr>
-              <a:spcAft>
-                <a:spcPts val="600"/>
-              </a:spcAft>
-            </a:pPr>
-            <a:r>
-              <a:rPr sz="1500">
-                <a:solidFill>
-                  <a:srgbClr val="22282E"/>
-                </a:solidFill>
-              </a:rPr>
-              <a:t>•  Diseño de pruebas: para 4 controles (MFA obligatorio, revocación de accesos al cese, principio de mínimo privilegio, revisión trimestral de permisos), define qué evidencia solicitarías y cómo la verificarías.</a:t>
-            </a:r>
-          </a:p>
-          <a:p>
-            <a:pPr>
-              <a:spcAft>
-                <a:spcPts val="600"/>
-              </a:spcAft>
-            </a:pPr>
-            <a:r>
-              <a:rPr sz="1500">
-                <a:solidFill>
-                  <a:srgbClr val="22282E"/>
-                </a:solidFill>
-              </a:rPr>
-              <a:t>•  Muestreo: de una lista ficticia de 50 usuarios, define una muestra de 10 y comprueba (con datos de ejemplo) si tienen MFA y si los ex-empleados están deshabilitados.</a:t>
-            </a:r>
-          </a:p>
-          <a:p>
-            <a:pPr>
-              <a:spcAft>
-                <a:spcPts val="600"/>
-              </a:spcAft>
-            </a:pPr>
-            <a:r>
-              <a:rPr sz="1500">
-                <a:solidFill>
-                  <a:srgbClr val="22282E"/>
-                </a:solidFill>
-              </a:rPr>
-              <a:t>•  Registro de hallazgos: documenta al menos 2 hallazgos (p. ej. "3 de 10 cuentas sin MFA"; "1 ex-empleado con acceso activo"), clasifícalos en mayor/menor y anota la evidencia.</a:t>
-            </a:r>
-          </a:p>
-          <a:p>
-            <a:pPr>
-              <a:spcAft>
-                <a:spcPts val="600"/>
-              </a:spcAft>
-            </a:pPr>
-            <a:r>
-              <a:rPr sz="1500">
-                <a:solidFill>
-                  <a:srgbClr val="22282E"/>
-                </a:solidFill>
-              </a:rPr>
-              <a:t>•  CAPA: para cada hallazgo redacta la acción correctiva, la causa raíz y la fecha de cierre.</a:t>
+              <a:t>•  El alumno diseña una prueba, conserva evidencia y redacta un hallazgo proporcional sin actuar como dueño del control.</a:t>
             </a:r>
           </a:p>
         </p:txBody>
@@ -4599,7 +4960,7 @@
                   <a:srgbClr val="0B3D2E"/>
                 </a:solidFill>
               </a:rPr>
-              <a:t>✍️ Ejercicios</a:t>
+              <a:t>📖 Definiciones y características</a:t>
             </a:r>
           </a:p>
         </p:txBody>
@@ -4637,82 +4998,97 @@
                   <a:srgbClr val="22282E"/>
                 </a:solidFill>
               </a:rPr>
-              <a:t>•  Diferencia auditoría de primera, segunda y tercera parte con un ejemplo.</a:t>
-            </a:r>
-          </a:p>
-          <a:p>
-            <a:pPr>
-              <a:spcAft>
-                <a:spcPts val="600"/>
-              </a:spcAft>
-            </a:pPr>
-            <a:r>
-              <a:rPr sz="1500">
-                <a:solidFill>
-                  <a:srgbClr val="22282E"/>
-                </a:solidFill>
-              </a:rPr>
-              <a:t>•  ¿Por qué el auditor no puede auditar su propio trabajo? Explica el principio de independencia.</a:t>
-            </a:r>
-          </a:p>
-          <a:p>
-            <a:pPr>
-              <a:spcAft>
-                <a:spcPts val="600"/>
-              </a:spcAft>
-            </a:pPr>
-            <a:r>
-              <a:rPr sz="1500">
-                <a:solidFill>
-                  <a:srgbClr val="22282E"/>
-                </a:solidFill>
-              </a:rPr>
-              <a:t>•  Convierte un control ("los accesos se revisan trimestralmente") en una prueba de auditoría con evidencia concreta.</a:t>
-            </a:r>
-          </a:p>
-          <a:p>
-            <a:pPr>
-              <a:spcAft>
-                <a:spcPts val="600"/>
-              </a:spcAft>
-            </a:pPr>
-            <a:r>
-              <a:rPr sz="1500">
-                <a:solidFill>
-                  <a:srgbClr val="22282E"/>
-                </a:solidFill>
-              </a:rPr>
-              <a:t>•  Explica la diferencia entre SOC 2 Type I y Type II.</a:t>
-            </a:r>
-          </a:p>
-          <a:p>
-            <a:pPr>
-              <a:spcAft>
-                <a:spcPts val="600"/>
-              </a:spcAft>
-            </a:pPr>
-            <a:r>
-              <a:rPr sz="1500">
-                <a:solidFill>
-                  <a:srgbClr val="22282E"/>
-                </a:solidFill>
-              </a:rPr>
-              <a:t>•  Clasifica en mayor/menor: falta total de MFA en administradores; una excepción documentada y aprobada.</a:t>
-            </a:r>
-          </a:p>
-          <a:p>
-            <a:pPr>
-              <a:spcAft>
-                <a:spcPts val="600"/>
-              </a:spcAft>
-            </a:pPr>
-            <a:r>
-              <a:rPr sz="1500">
-                <a:solidFill>
-                  <a:srgbClr val="22282E"/>
-                </a:solidFill>
-              </a:rPr>
-              <a:t>•  Redacta una CAPA para el hallazgo "logs del SIEM se retienen 7 días en lugar de 90".</a:t>
+              <a:t>•  Auditoría de seguridad: evaluación sistemática e independiente de controles frente a un criterio. Clave: independencia y objetividad.</a:t>
+            </a:r>
+          </a:p>
+          <a:p>
+            <a:pPr>
+              <a:spcAft>
+                <a:spcPts val="600"/>
+              </a:spcAft>
+            </a:pPr>
+            <a:r>
+              <a:rPr sz="1500">
+                <a:solidFill>
+                  <a:srgbClr val="22282E"/>
+                </a:solidFill>
+              </a:rPr>
+              <a:t>•  Auditor de primera/segunda/tercera parte: interno, del cliente, o externo independiente. Clave: la certificación exige tercera parte.</a:t>
+            </a:r>
+          </a:p>
+          <a:p>
+            <a:pPr>
+              <a:spcAft>
+                <a:spcPts val="600"/>
+              </a:spcAft>
+            </a:pPr>
+            <a:r>
+              <a:rPr sz="1500">
+                <a:solidFill>
+                  <a:srgbClr val="22282E"/>
+                </a:solidFill>
+              </a:rPr>
+              <a:t>•  Criterio de auditoría: el estándar contra el que se compara (ISO 27001, PCI-DSS, política interna). Clave: sin criterio no hay auditoría.</a:t>
+            </a:r>
+          </a:p>
+          <a:p>
+            <a:pPr>
+              <a:spcAft>
+                <a:spcPts val="600"/>
+              </a:spcAft>
+            </a:pPr>
+            <a:r>
+              <a:rPr sz="1500">
+                <a:solidFill>
+                  <a:srgbClr val="22282E"/>
+                </a:solidFill>
+              </a:rPr>
+              <a:t>•  Evidencia: registros, entrevistas, observaciones y reejecuciones que sustentan una conclusión. Clave: debe ser trazable y suficiente.</a:t>
+            </a:r>
+          </a:p>
+          <a:p>
+            <a:pPr>
+              <a:spcAft>
+                <a:spcPts val="600"/>
+              </a:spcAft>
+            </a:pPr>
+            <a:r>
+              <a:rPr sz="1500">
+                <a:solidFill>
+                  <a:srgbClr val="22282E"/>
+                </a:solidFill>
+              </a:rPr>
+              <a:t>•  SOC 2: informe de aseguramiento sobre los Trust Services Criteria (seguridad, disponibilidad, confidencialidad, etc.). Clave: Type I evalúa el diseño; Type II, la eficacia operativa en un periodo.</a:t>
+            </a:r>
+          </a:p>
+          <a:p>
+            <a:pPr>
+              <a:spcAft>
+                <a:spcPts val="600"/>
+              </a:spcAft>
+            </a:pPr>
+            <a:r>
+              <a:rPr sz="1500">
+                <a:solidFill>
+                  <a:srgbClr val="22282E"/>
+                </a:solidFill>
+              </a:rPr>
+              <a:t>•  Hallazgo / no conformidad: incumplimiento detectado; mayor o menor. Clave: genera acción correctiva.</a:t>
+            </a:r>
+          </a:p>
+          <a:p>
+            <a:pPr>
+              <a:spcAft>
+                <a:spcPts val="600"/>
+              </a:spcAft>
+            </a:pPr>
+            <a:r>
+              <a:rPr sz="1500">
+                <a:solidFill>
+                  <a:srgbClr val="22282E"/>
+                </a:solidFill>
+              </a:rPr>
+              <a:t>•  CAPA: acción correctiva y preventiva. Clave: corrige la causa raíz, no solo el síntoma.</a:t>
             </a:r>
           </a:p>
         </p:txBody>
@@ -4763,7 +5139,7 @@
                   <a:srgbClr val="0B3D2E"/>
                 </a:solidFill>
               </a:rPr>
-              <a:t>📝 Reto verificable</a:t>
+              <a:t>🧰 Herramientas y preparación</a:t>
             </a:r>
           </a:p>
         </p:txBody>
@@ -4801,22 +5177,52 @@
                   <a:srgbClr val="22282E"/>
                 </a:solidFill>
               </a:rPr>
-              <a:t>•  Entrega un paquete de auditoría interna con: plan de auditoría, diseño de pruebas para 4 controles, muestreo ejecutado con hallazgos clasificados, CAPA por hallazgo y un informe ejecutivo con conclusión.</a:t>
-            </a:r>
-          </a:p>
-          <a:p>
-            <a:pPr>
-              <a:spcAft>
-                <a:spcPts val="600"/>
-              </a:spcAft>
-            </a:pPr>
-            <a:r>
-              <a:rPr sz="1500">
-                <a:solidFill>
-                  <a:srgbClr val="22282E"/>
-                </a:solidFill>
-              </a:rPr>
-              <a:t>•  Criterio de aceptación: cada hallazgo cita evidencia y criterio incumplido, cada CAPA identifica causa raíz y fecha de cierre, y el informe distingue hallazgos mayores de menores con recomendaciones priorizadas.</a:t>
+              <a:t>•  Hoja de cálculo para el plan de auditoría, la matriz de evidencia y el registro de hallazgos.</a:t>
+            </a:r>
+          </a:p>
+          <a:p>
+            <a:pPr>
+              <a:spcAft>
+                <a:spcPts val="600"/>
+              </a:spcAft>
+            </a:pPr>
+            <a:r>
+              <a:rPr sz="1500">
+                <a:solidFill>
+                  <a:srgbClr val="22282E"/>
+                </a:solidFill>
+              </a:rPr>
+              <a:t>•  Referencia: ISO 19011 (directrices para auditar sistemas de gestión) y los Trust Services Criteria de AICPA (SOC 2).</a:t>
+            </a:r>
+          </a:p>
+          <a:p>
+            <a:pPr>
+              <a:spcAft>
+                <a:spcPts val="600"/>
+              </a:spcAft>
+            </a:pPr>
+            <a:r>
+              <a:rPr sz="1500">
+                <a:solidFill>
+                  <a:srgbClr val="22282E"/>
+                </a:solidFill>
+              </a:rPr>
+              <a:t>•  Para evidencia técnica: capturas de configuración, logs, exportaciones de un IAM/SIEM (reutiliza lo aprendido en partes previas).</a:t>
+            </a:r>
+          </a:p>
+          <a:p>
+            <a:pPr>
+              <a:spcAft>
+                <a:spcPts val="600"/>
+              </a:spcAft>
+            </a:pPr>
+            <a:r>
+              <a:rPr sz="1500">
+                <a:solidFill>
+                  <a:srgbClr val="22282E"/>
+                </a:solidFill>
+              </a:rPr>
+              <a:t>•  Opcional: herramientas GRC de recolección continua de evidencia (Vanta, Drata) a nivel conceptual.</a:t>
             </a:r>
           </a:p>
         </p:txBody>
